--- a/Titanik_Veri_Analizi_Modern_Sunum kapanış sunumu.pptx
+++ b/Titanik_Veri_Analizi_Modern_Sunum kapanış sunumu.pptx
@@ -10,11 +10,11 @@
     <p:sldId id="258" r:id="rId4"/>
     <p:sldId id="259" r:id="rId5"/>
     <p:sldId id="260" r:id="rId6"/>
-    <p:sldId id="262" r:id="rId12"/>
-    <p:sldId id="264" r:id="rId14"/>
-    <p:sldId id="263" r:id="rId13"/>
-    <p:sldId id="265" r:id="rId15"/>
-    <p:sldId id="261" r:id="rId7"/>
+    <p:sldId id="262" r:id="rId7"/>
+    <p:sldId id="264" r:id="rId8"/>
+    <p:sldId id="263" r:id="rId9"/>
+    <p:sldId id="265" r:id="rId10"/>
+    <p:sldId id="261" r:id="rId11"/>
   </p:sldIdLst>
   <p:sldSz cx="12192000" cy="6858000"/>
   <p:notesSz cx="6858000" cy="9144000"/>
@@ -313,7 +313,7 @@
           <a:p>
             <a:fld id="{5BCAD085-E8A6-8845-BD4E-CB4CCA059FC4}" type="datetimeFigureOut">
               <a:rPr lang="en-US" smtClean="0"/>
-              <a:t>8/25/2026</a:t>
+              <a:t>9/10/2026</a:t>
             </a:fld>
             <a:endParaRPr lang="en-US"/>
           </a:p>
@@ -483,7 +483,7 @@
           <a:p>
             <a:fld id="{5BCAD085-E8A6-8845-BD4E-CB4CCA059FC4}" type="datetimeFigureOut">
               <a:rPr lang="en-US" smtClean="0"/>
-              <a:t>8/25/2026</a:t>
+              <a:t>9/10/2026</a:t>
             </a:fld>
             <a:endParaRPr lang="en-US"/>
           </a:p>
@@ -663,7 +663,7 @@
           <a:p>
             <a:fld id="{5BCAD085-E8A6-8845-BD4E-CB4CCA059FC4}" type="datetimeFigureOut">
               <a:rPr lang="en-US" smtClean="0"/>
-              <a:t>8/25/2026</a:t>
+              <a:t>9/10/2026</a:t>
             </a:fld>
             <a:endParaRPr lang="en-US"/>
           </a:p>
@@ -833,7 +833,7 @@
           <a:p>
             <a:fld id="{5BCAD085-E8A6-8845-BD4E-CB4CCA059FC4}" type="datetimeFigureOut">
               <a:rPr lang="en-US" smtClean="0"/>
-              <a:t>8/25/2026</a:t>
+              <a:t>9/10/2026</a:t>
             </a:fld>
             <a:endParaRPr lang="en-US"/>
           </a:p>
@@ -1079,7 +1079,7 @@
           <a:p>
             <a:fld id="{5BCAD085-E8A6-8845-BD4E-CB4CCA059FC4}" type="datetimeFigureOut">
               <a:rPr lang="en-US" smtClean="0"/>
-              <a:t>8/25/2026</a:t>
+              <a:t>9/10/2026</a:t>
             </a:fld>
             <a:endParaRPr lang="en-US"/>
           </a:p>
@@ -1367,7 +1367,7 @@
           <a:p>
             <a:fld id="{5BCAD085-E8A6-8845-BD4E-CB4CCA059FC4}" type="datetimeFigureOut">
               <a:rPr lang="en-US" smtClean="0"/>
-              <a:t>8/25/2026</a:t>
+              <a:t>9/10/2026</a:t>
             </a:fld>
             <a:endParaRPr lang="en-US"/>
           </a:p>
@@ -1789,7 +1789,7 @@
           <a:p>
             <a:fld id="{5BCAD085-E8A6-8845-BD4E-CB4CCA059FC4}" type="datetimeFigureOut">
               <a:rPr lang="en-US" smtClean="0"/>
-              <a:t>8/25/2026</a:t>
+              <a:t>9/10/2026</a:t>
             </a:fld>
             <a:endParaRPr lang="en-US"/>
           </a:p>
@@ -1907,7 +1907,7 @@
           <a:p>
             <a:fld id="{5BCAD085-E8A6-8845-BD4E-CB4CCA059FC4}" type="datetimeFigureOut">
               <a:rPr lang="en-US" smtClean="0"/>
-              <a:t>8/25/2026</a:t>
+              <a:t>9/10/2026</a:t>
             </a:fld>
             <a:endParaRPr lang="en-US"/>
           </a:p>
@@ -2002,7 +2002,7 @@
           <a:p>
             <a:fld id="{5BCAD085-E8A6-8845-BD4E-CB4CCA059FC4}" type="datetimeFigureOut">
               <a:rPr lang="en-US" smtClean="0"/>
-              <a:t>8/25/2026</a:t>
+              <a:t>9/10/2026</a:t>
             </a:fld>
             <a:endParaRPr lang="en-US"/>
           </a:p>
@@ -2279,7 +2279,7 @@
           <a:p>
             <a:fld id="{5BCAD085-E8A6-8845-BD4E-CB4CCA059FC4}" type="datetimeFigureOut">
               <a:rPr lang="en-US" smtClean="0"/>
-              <a:t>8/25/2026</a:t>
+              <a:t>9/10/2026</a:t>
             </a:fld>
             <a:endParaRPr lang="en-US"/>
           </a:p>
@@ -2532,7 +2532,7 @@
           <a:p>
             <a:fld id="{5BCAD085-E8A6-8845-BD4E-CB4CCA059FC4}" type="datetimeFigureOut">
               <a:rPr lang="en-US" smtClean="0"/>
-              <a:t>8/25/2026</a:t>
+              <a:t>9/10/2026</a:t>
             </a:fld>
             <a:endParaRPr lang="en-US"/>
           </a:p>
@@ -2745,7 +2745,7 @@
           <a:p>
             <a:fld id="{5BCAD085-E8A6-8845-BD4E-CB4CCA059FC4}" type="datetimeFigureOut">
               <a:rPr lang="en-US" smtClean="0"/>
-              <a:t>8/25/2026</a:t>
+              <a:t>9/10/2026</a:t>
             </a:fld>
             <a:endParaRPr lang="en-US"/>
           </a:p>
@@ -4612,360 +4612,360 @@
           <a:p>
             <a:pPr algn="l"/>
             <a:r>
-              <a:rPr sz="1100" b="0" dirty="0" err="1">
-                <a:solidFill>
-                  <a:srgbClr val="A5B5C9"/>
+              <a:rPr sz="1100" dirty="0" err="1">
+                <a:solidFill>
+                  <a:schemeClr val="bg1"/>
                 </a:solidFill>
                 <a:latin typeface="Aptos"/>
               </a:rPr>
               <a:t>Titanik</a:t>
             </a:r>
             <a:r>
-              <a:rPr sz="1100" b="0" dirty="0">
-                <a:solidFill>
-                  <a:srgbClr val="A5B5C9"/>
+              <a:rPr sz="1100" dirty="0">
+                <a:solidFill>
+                  <a:schemeClr val="bg1"/>
                 </a:solidFill>
                 <a:latin typeface="Aptos"/>
               </a:rPr>
               <a:t> </a:t>
             </a:r>
             <a:r>
-              <a:rPr sz="1100" b="0" dirty="0" err="1">
-                <a:solidFill>
-                  <a:srgbClr val="A5B5C9"/>
+              <a:rPr sz="1100" dirty="0" err="1">
+                <a:solidFill>
+                  <a:schemeClr val="bg1"/>
                 </a:solidFill>
                 <a:latin typeface="Aptos"/>
               </a:rPr>
               <a:t>kazasındaki</a:t>
             </a:r>
             <a:r>
-              <a:rPr sz="1100" b="0" dirty="0">
-                <a:solidFill>
-                  <a:srgbClr val="A5B5C9"/>
+              <a:rPr sz="1100" dirty="0">
+                <a:solidFill>
+                  <a:schemeClr val="bg1"/>
                 </a:solidFill>
                 <a:latin typeface="Aptos"/>
               </a:rPr>
               <a:t> </a:t>
             </a:r>
             <a:r>
-              <a:rPr sz="1100" b="0" dirty="0" err="1">
-                <a:solidFill>
-                  <a:srgbClr val="A5B5C9"/>
+              <a:rPr sz="1100" dirty="0" err="1">
+                <a:solidFill>
+                  <a:schemeClr val="bg1"/>
                 </a:solidFill>
                 <a:latin typeface="Aptos"/>
               </a:rPr>
               <a:t>yolcu</a:t>
             </a:r>
             <a:r>
-              <a:rPr sz="1100" b="0" dirty="0">
-                <a:solidFill>
-                  <a:srgbClr val="A5B5C9"/>
+              <a:rPr sz="1100" dirty="0">
+                <a:solidFill>
+                  <a:schemeClr val="bg1"/>
                 </a:solidFill>
                 <a:latin typeface="Aptos"/>
               </a:rPr>
               <a:t> </a:t>
             </a:r>
             <a:r>
-              <a:rPr sz="1100" b="0" dirty="0" err="1">
-                <a:solidFill>
-                  <a:srgbClr val="A5B5C9"/>
+              <a:rPr sz="1100" dirty="0" err="1">
+                <a:solidFill>
+                  <a:schemeClr val="bg1"/>
                 </a:solidFill>
                 <a:latin typeface="Aptos"/>
               </a:rPr>
               <a:t>verilerini</a:t>
             </a:r>
             <a:r>
-              <a:rPr sz="1100" b="0" dirty="0">
-                <a:solidFill>
-                  <a:srgbClr val="A5B5C9"/>
+              <a:rPr sz="1100" dirty="0">
+                <a:solidFill>
+                  <a:schemeClr val="bg1"/>
                 </a:solidFill>
                 <a:latin typeface="Aptos"/>
               </a:rPr>
               <a:t> </a:t>
             </a:r>
             <a:r>
-              <a:rPr sz="1100" b="0" dirty="0" err="1">
-                <a:solidFill>
-                  <a:srgbClr val="A5B5C9"/>
+              <a:rPr sz="1100" dirty="0" err="1">
+                <a:solidFill>
+                  <a:schemeClr val="bg1"/>
                 </a:solidFill>
                 <a:latin typeface="Aptos"/>
               </a:rPr>
               <a:t>inceleyerek</a:t>
             </a:r>
             <a:r>
-              <a:rPr sz="1100" b="0" dirty="0">
-                <a:solidFill>
-                  <a:srgbClr val="A5B5C9"/>
+              <a:rPr sz="1100" dirty="0">
+                <a:solidFill>
+                  <a:schemeClr val="bg1"/>
                 </a:solidFill>
                 <a:latin typeface="Aptos"/>
               </a:rPr>
               <a:t>; </a:t>
             </a:r>
             <a:r>
-              <a:rPr sz="1100" b="0" dirty="0" err="1">
-                <a:solidFill>
-                  <a:srgbClr val="A5B5C9"/>
+              <a:rPr sz="1100" dirty="0" err="1">
+                <a:solidFill>
+                  <a:schemeClr val="bg1"/>
                 </a:solidFill>
                 <a:latin typeface="Aptos"/>
               </a:rPr>
               <a:t>makine</a:t>
             </a:r>
             <a:r>
-              <a:rPr sz="1100" b="0" dirty="0">
-                <a:solidFill>
-                  <a:srgbClr val="A5B5C9"/>
+              <a:rPr sz="1100" dirty="0">
+                <a:solidFill>
+                  <a:schemeClr val="bg1"/>
                 </a:solidFill>
                 <a:latin typeface="Aptos"/>
               </a:rPr>
               <a:t> </a:t>
             </a:r>
             <a:r>
-              <a:rPr sz="1100" b="0" dirty="0" err="1">
-                <a:solidFill>
-                  <a:srgbClr val="A5B5C9"/>
+              <a:rPr sz="1100" dirty="0" err="1">
+                <a:solidFill>
+                  <a:schemeClr val="bg1"/>
                 </a:solidFill>
                 <a:latin typeface="Aptos"/>
               </a:rPr>
               <a:t>öğrenimi</a:t>
             </a:r>
             <a:r>
-              <a:rPr sz="1100" b="0" dirty="0">
-                <a:solidFill>
-                  <a:srgbClr val="A5B5C9"/>
+              <a:rPr sz="1100" dirty="0">
+                <a:solidFill>
+                  <a:schemeClr val="bg1"/>
                 </a:solidFill>
                 <a:latin typeface="Aptos"/>
               </a:rPr>
               <a:t> </a:t>
             </a:r>
             <a:r>
-              <a:rPr sz="1100" b="0" dirty="0" err="1">
-                <a:solidFill>
-                  <a:srgbClr val="A5B5C9"/>
+              <a:rPr sz="1100" dirty="0" err="1">
+                <a:solidFill>
+                  <a:schemeClr val="bg1"/>
                 </a:solidFill>
                 <a:latin typeface="Aptos"/>
               </a:rPr>
               <a:t>yardımıyla</a:t>
             </a:r>
             <a:r>
-              <a:rPr sz="1100" b="0" dirty="0">
-                <a:solidFill>
-                  <a:srgbClr val="A5B5C9"/>
+              <a:rPr sz="1100" dirty="0">
+                <a:solidFill>
+                  <a:schemeClr val="bg1"/>
                 </a:solidFill>
                 <a:latin typeface="Aptos"/>
               </a:rPr>
               <a:t> </a:t>
             </a:r>
             <a:r>
-              <a:rPr sz="1100" b="0" dirty="0" err="1">
-                <a:solidFill>
-                  <a:srgbClr val="A5B5C9"/>
+              <a:rPr sz="1100" dirty="0" err="1">
+                <a:solidFill>
+                  <a:schemeClr val="bg1"/>
                 </a:solidFill>
                 <a:latin typeface="Aptos"/>
               </a:rPr>
               <a:t>hangi</a:t>
             </a:r>
             <a:r>
-              <a:rPr sz="1100" b="0" dirty="0">
-                <a:solidFill>
-                  <a:srgbClr val="A5B5C9"/>
+              <a:rPr sz="1100" dirty="0">
+                <a:solidFill>
+                  <a:schemeClr val="bg1"/>
                 </a:solidFill>
                 <a:latin typeface="Aptos"/>
               </a:rPr>
               <a:t> </a:t>
             </a:r>
             <a:r>
-              <a:rPr sz="1100" b="0" dirty="0" err="1">
-                <a:solidFill>
-                  <a:srgbClr val="A5B5C9"/>
+              <a:rPr sz="1100" dirty="0" err="1">
+                <a:solidFill>
+                  <a:schemeClr val="bg1"/>
                 </a:solidFill>
                 <a:latin typeface="Aptos"/>
               </a:rPr>
               <a:t>yolcunun</a:t>
             </a:r>
             <a:r>
-              <a:rPr sz="1100" b="0" dirty="0">
-                <a:solidFill>
-                  <a:srgbClr val="A5B5C9"/>
+              <a:rPr sz="1100" dirty="0">
+                <a:solidFill>
+                  <a:schemeClr val="bg1"/>
                 </a:solidFill>
                 <a:latin typeface="Aptos"/>
               </a:rPr>
               <a:t> </a:t>
             </a:r>
             <a:r>
-              <a:rPr sz="1100" b="0" dirty="0" err="1">
-                <a:solidFill>
-                  <a:srgbClr val="A5B5C9"/>
+              <a:rPr sz="1100" dirty="0" err="1">
+                <a:solidFill>
+                  <a:schemeClr val="bg1"/>
                 </a:solidFill>
                 <a:latin typeface="Aptos"/>
               </a:rPr>
               <a:t>hayatta</a:t>
             </a:r>
             <a:r>
-              <a:rPr sz="1100" b="0" dirty="0">
-                <a:solidFill>
-                  <a:srgbClr val="A5B5C9"/>
+              <a:rPr sz="1100" dirty="0">
+                <a:solidFill>
+                  <a:schemeClr val="bg1"/>
                 </a:solidFill>
                 <a:latin typeface="Aptos"/>
               </a:rPr>
               <a:t> </a:t>
             </a:r>
             <a:r>
-              <a:rPr sz="1100" b="0" dirty="0" err="1">
-                <a:solidFill>
-                  <a:srgbClr val="A5B5C9"/>
+              <a:rPr sz="1100" dirty="0" err="1">
+                <a:solidFill>
+                  <a:schemeClr val="bg1"/>
                 </a:solidFill>
                 <a:latin typeface="Aptos"/>
               </a:rPr>
               <a:t>kalma</a:t>
             </a:r>
             <a:r>
-              <a:rPr sz="1100" b="0" dirty="0">
-                <a:solidFill>
-                  <a:srgbClr val="A5B5C9"/>
+              <a:rPr sz="1100" dirty="0">
+                <a:solidFill>
+                  <a:schemeClr val="bg1"/>
                 </a:solidFill>
                 <a:latin typeface="Aptos"/>
               </a:rPr>
               <a:t> </a:t>
             </a:r>
             <a:r>
-              <a:rPr sz="1100" b="0" dirty="0" err="1">
-                <a:solidFill>
-                  <a:srgbClr val="A5B5C9"/>
+              <a:rPr sz="1100" dirty="0" err="1">
+                <a:solidFill>
+                  <a:schemeClr val="bg1"/>
                 </a:solidFill>
                 <a:latin typeface="Aptos"/>
               </a:rPr>
               <a:t>ihtimalinin</a:t>
             </a:r>
             <a:r>
-              <a:rPr sz="1100" b="0" dirty="0">
-                <a:solidFill>
-                  <a:srgbClr val="A5B5C9"/>
+              <a:rPr sz="1100" dirty="0">
+                <a:solidFill>
+                  <a:schemeClr val="bg1"/>
                 </a:solidFill>
                 <a:latin typeface="Aptos"/>
               </a:rPr>
               <a:t> </a:t>
             </a:r>
             <a:r>
-              <a:rPr sz="1100" b="0" dirty="0" err="1">
-                <a:solidFill>
-                  <a:srgbClr val="A5B5C9"/>
+              <a:rPr sz="1100" dirty="0" err="1">
+                <a:solidFill>
+                  <a:schemeClr val="bg1"/>
                 </a:solidFill>
                 <a:latin typeface="Aptos"/>
               </a:rPr>
               <a:t>daha</a:t>
             </a:r>
             <a:r>
-              <a:rPr sz="1100" b="0" dirty="0">
-                <a:solidFill>
-                  <a:srgbClr val="A5B5C9"/>
+              <a:rPr sz="1100" dirty="0">
+                <a:solidFill>
+                  <a:schemeClr val="bg1"/>
                 </a:solidFill>
                 <a:latin typeface="Aptos"/>
               </a:rPr>
               <a:t> </a:t>
             </a:r>
             <a:r>
-              <a:rPr sz="1100" b="0" dirty="0" err="1">
-                <a:solidFill>
-                  <a:srgbClr val="A5B5C9"/>
+              <a:rPr sz="1100" dirty="0" err="1">
+                <a:solidFill>
+                  <a:schemeClr val="bg1"/>
                 </a:solidFill>
                 <a:latin typeface="Aptos"/>
               </a:rPr>
               <a:t>yüksek</a:t>
             </a:r>
             <a:r>
-              <a:rPr sz="1100" b="0" dirty="0">
-                <a:solidFill>
-                  <a:srgbClr val="A5B5C9"/>
+              <a:rPr sz="1100" dirty="0">
+                <a:solidFill>
+                  <a:schemeClr val="bg1"/>
                 </a:solidFill>
                 <a:latin typeface="Aptos"/>
               </a:rPr>
               <a:t> </a:t>
             </a:r>
             <a:r>
-              <a:rPr sz="1100" b="0" dirty="0" err="1">
-                <a:solidFill>
-                  <a:srgbClr val="A5B5C9"/>
+              <a:rPr sz="1100" dirty="0" err="1">
+                <a:solidFill>
+                  <a:schemeClr val="bg1"/>
                 </a:solidFill>
                 <a:latin typeface="Aptos"/>
               </a:rPr>
               <a:t>olduğunu</a:t>
             </a:r>
             <a:r>
-              <a:rPr sz="1100" b="0" dirty="0">
-                <a:solidFill>
-                  <a:srgbClr val="A5B5C9"/>
+              <a:rPr sz="1100" dirty="0">
+                <a:solidFill>
+                  <a:schemeClr val="bg1"/>
                 </a:solidFill>
                 <a:latin typeface="Aptos"/>
               </a:rPr>
               <a:t> </a:t>
             </a:r>
             <a:r>
-              <a:rPr sz="1100" b="0" dirty="0" err="1">
-                <a:solidFill>
-                  <a:srgbClr val="A5B5C9"/>
+              <a:rPr sz="1100" dirty="0" err="1">
+                <a:solidFill>
+                  <a:schemeClr val="bg1"/>
                 </a:solidFill>
                 <a:latin typeface="Aptos"/>
               </a:rPr>
               <a:t>tahmin</a:t>
             </a:r>
             <a:r>
-              <a:rPr sz="1100" b="0" dirty="0">
-                <a:solidFill>
-                  <a:srgbClr val="A5B5C9"/>
+              <a:rPr sz="1100" dirty="0">
+                <a:solidFill>
+                  <a:schemeClr val="bg1"/>
                 </a:solidFill>
                 <a:latin typeface="Aptos"/>
               </a:rPr>
               <a:t> </a:t>
             </a:r>
             <a:r>
-              <a:rPr sz="1100" b="0" dirty="0" err="1">
-                <a:solidFill>
-                  <a:srgbClr val="A5B5C9"/>
+              <a:rPr sz="1100" dirty="0" err="1">
+                <a:solidFill>
+                  <a:schemeClr val="bg1"/>
                 </a:solidFill>
                 <a:latin typeface="Aptos"/>
               </a:rPr>
               <a:t>edecek</a:t>
             </a:r>
             <a:r>
-              <a:rPr sz="1100" b="0" dirty="0">
-                <a:solidFill>
-                  <a:srgbClr val="A5B5C9"/>
+              <a:rPr sz="1100" dirty="0">
+                <a:solidFill>
+                  <a:schemeClr val="bg1"/>
                 </a:solidFill>
                 <a:latin typeface="Aptos"/>
               </a:rPr>
               <a:t> </a:t>
             </a:r>
             <a:r>
-              <a:rPr sz="1100" b="0" dirty="0" err="1">
-                <a:solidFill>
-                  <a:srgbClr val="A5B5C9"/>
+              <a:rPr sz="1100" dirty="0" err="1">
+                <a:solidFill>
+                  <a:schemeClr val="bg1"/>
                 </a:solidFill>
                 <a:latin typeface="Aptos"/>
               </a:rPr>
               <a:t>bir</a:t>
             </a:r>
             <a:r>
-              <a:rPr sz="1100" b="0" dirty="0">
-                <a:solidFill>
-                  <a:srgbClr val="A5B5C9"/>
+              <a:rPr sz="1100" dirty="0">
+                <a:solidFill>
+                  <a:schemeClr val="bg1"/>
                 </a:solidFill>
                 <a:latin typeface="Aptos"/>
               </a:rPr>
               <a:t> model </a:t>
             </a:r>
             <a:r>
-              <a:rPr sz="1100" b="0" dirty="0" err="1">
-                <a:solidFill>
-                  <a:srgbClr val="A5B5C9"/>
+              <a:rPr sz="1100" dirty="0" err="1">
+                <a:solidFill>
+                  <a:schemeClr val="bg1"/>
                 </a:solidFill>
                 <a:latin typeface="Aptos"/>
               </a:rPr>
               <a:t>oluşturmak</a:t>
             </a:r>
             <a:r>
-              <a:rPr sz="1100" b="0" dirty="0">
-                <a:solidFill>
-                  <a:srgbClr val="A5B5C9"/>
+              <a:rPr sz="1100" dirty="0">
+                <a:solidFill>
+                  <a:schemeClr val="bg1"/>
                 </a:solidFill>
                 <a:latin typeface="Aptos"/>
               </a:rPr>
@@ -5138,87 +5138,6 @@
       </p:sp>
       <p:sp>
         <p:nvSpPr>
-          <p:cNvPr id="16" name="Rounded Rectangle 15"/>
-          <p:cNvSpPr/>
-          <p:nvPr/>
-        </p:nvSpPr>
-        <p:spPr>
-          <a:xfrm>
-            <a:off x="914400" y="5074920"/>
-            <a:ext cx="10332720" cy="502920"/>
-          </a:xfrm>
-          <a:prstGeom prst="roundRect">
-            <a:avLst/>
-          </a:prstGeom>
-          <a:solidFill>
-            <a:srgbClr val="182B45"/>
-          </a:solidFill>
-          <a:ln>
-            <a:solidFill>
-              <a:srgbClr val="182B45"/>
-            </a:solidFill>
-          </a:ln>
-        </p:spPr>
-        <p:style>
-          <a:lnRef idx="1">
-            <a:schemeClr val="accent1"/>
-          </a:lnRef>
-          <a:fillRef idx="3">
-            <a:schemeClr val="accent1"/>
-          </a:fillRef>
-          <a:effectRef idx="2">
-            <a:schemeClr val="accent1"/>
-          </a:effectRef>
-          <a:fontRef idx="minor">
-            <a:schemeClr val="lt1"/>
-          </a:fontRef>
-        </p:style>
-        <p:txBody>
-          <a:bodyPr rtlCol="0" anchor="ctr"/>
-          <a:lstStyle/>
-          <a:p>
-            <a:pPr algn="ctr"/>
-            <a:endParaRPr/>
-          </a:p>
-        </p:txBody>
-      </p:sp>
-      <p:sp>
-        <p:nvSpPr>
-          <p:cNvPr id="17" name="TextBox 16"/>
-          <p:cNvSpPr txBox="1"/>
-          <p:nvPr/>
-        </p:nvSpPr>
-        <p:spPr>
-          <a:xfrm>
-            <a:off x="1097280" y="5230368"/>
-            <a:ext cx="9966960" cy="182880"/>
-          </a:xfrm>
-          <a:prstGeom prst="rect">
-            <a:avLst/>
-          </a:prstGeom>
-          <a:noFill/>
-        </p:spPr>
-        <p:txBody>
-          <a:bodyPr wrap="square" anchor="t">
-            <a:spAutoFit/>
-          </a:bodyPr>
-          <a:lstStyle/>
-          <a:p>
-            <a:pPr algn="ctr"/>
-            <a:r>
-              <a:rPr sz="1000" b="1">
-                <a:solidFill>
-                  <a:srgbClr val="FFB547"/>
-                </a:solidFill>
-                <a:latin typeface="Aptos"/>
-              </a:rPr>
-              <a:t>ÖNEMLİ NOT  •  Frontend uygulamaları bu proje kapsamında kesinlikle dahil değildir.</a:t>
-            </a:r>
-          </a:p>
-        </p:txBody>
-      </p:sp>
-      <p:sp>
-        <p:nvSpPr>
           <p:cNvPr id="18" name="TextBox 17"/>
           <p:cNvSpPr txBox="1"/>
           <p:nvPr/>
@@ -5262,8 +5181,8 @@
         </p:nvSpPr>
         <p:spPr bwMode="auto">
           <a:xfrm>
-            <a:off x="6727370" y="2621905"/>
-            <a:ext cx="4170785" cy="938719"/>
+            <a:off x="6727370" y="2537267"/>
+            <a:ext cx="4170785" cy="1107996"/>
           </a:xfrm>
           <a:prstGeom prst="rect">
             <a:avLst/>
@@ -5379,6 +5298,52 @@
               </a:rPr>
               <a:t>.</a:t>
             </a:r>
+          </a:p>
+          <a:p>
+            <a:pPr marL="0" marR="0" lvl="0" indent="0" algn="l" defTabSz="914400" rtl="0" eaLnBrk="0" fontAlgn="base" latinLnBrk="0" hangingPunct="0">
+              <a:lnSpc>
+                <a:spcPct val="100000"/>
+              </a:lnSpc>
+              <a:spcBef>
+                <a:spcPct val="0"/>
+              </a:spcBef>
+              <a:spcAft>
+                <a:spcPct val="0"/>
+              </a:spcAft>
+              <a:buClrTx/>
+              <a:buSzTx/>
+              <a:buFontTx/>
+              <a:buNone/>
+              <a:tabLst/>
+            </a:pPr>
+            <a:r>
+              <a:rPr lang="tr-TR" altLang="tr-TR" sz="1100" dirty="0" err="1" smtClean="0">
+                <a:solidFill>
+                  <a:schemeClr val="bg1"/>
+                </a:solidFill>
+                <a:latin typeface="Arial" panose="020B0604020202020204" pitchFamily="34" charset="0"/>
+              </a:rPr>
+              <a:t>Frontend</a:t>
+            </a:r>
+            <a:r>
+              <a:rPr lang="tr-TR" altLang="tr-TR" sz="1100" dirty="0" smtClean="0">
+                <a:solidFill>
+                  <a:schemeClr val="bg1"/>
+                </a:solidFill>
+                <a:latin typeface="Arial" panose="020B0604020202020204" pitchFamily="34" charset="0"/>
+              </a:rPr>
+              <a:t> uygulamaları bu proje kapsamına dahil değildir.</a:t>
+            </a:r>
+            <a:endParaRPr kumimoji="0" lang="tr-TR" altLang="tr-TR" sz="1100" b="0" i="0" u="none" strike="noStrike" cap="none" normalizeH="0" baseline="0" dirty="0" smtClean="0">
+              <a:ln>
+                <a:noFill/>
+              </a:ln>
+              <a:solidFill>
+                <a:schemeClr val="bg1"/>
+              </a:solidFill>
+              <a:effectLst/>
+              <a:latin typeface="Arial" panose="020B0604020202020204" pitchFamily="34" charset="0"/>
+            </a:endParaRPr>
           </a:p>
         </p:txBody>
       </p:sp>
@@ -9664,15 +9629,12 @@
           <a:lstStyle/>
           <a:p>
             <a:pPr algn="l"/>
-            <a:r>
-              <a:rPr sz="1100" b="1" dirty="0">
-                <a:solidFill>
-                  <a:srgbClr val="F5F8FC"/>
-                </a:solidFill>
-                <a:latin typeface="Aptos"/>
-              </a:rPr>
-              <a:t>Baseline (Referans)</a:t>
-            </a:r>
+            <a:endParaRPr sz="1100" b="1" dirty="0">
+              <a:solidFill>
+                <a:srgbClr val="F5F8FC"/>
+              </a:solidFill>
+              <a:latin typeface="Aptos"/>
+            </a:endParaRPr>
           </a:p>
         </p:txBody>
       </p:sp>
@@ -9699,15 +9661,12 @@
           <a:lstStyle/>
           <a:p>
             <a:pPr algn="l"/>
-            <a:r>
-              <a:rPr sz="1100" b="0" dirty="0">
-                <a:solidFill>
-                  <a:srgbClr val="A5B5C9"/>
-                </a:solidFill>
-                <a:latin typeface="Aptos"/>
-              </a:rPr>
-              <a:t>~63.00%</a:t>
-            </a:r>
+            <a:endParaRPr sz="1100" b="0" dirty="0">
+              <a:solidFill>
+                <a:srgbClr val="A5B5C9"/>
+              </a:solidFill>
+              <a:latin typeface="Aptos"/>
+            </a:endParaRPr>
           </a:p>
         </p:txBody>
       </p:sp>
@@ -9734,15 +9693,12 @@
           <a:lstStyle/>
           <a:p>
             <a:pPr algn="l"/>
-            <a:r>
-              <a:rPr sz="1000" b="0" dirty="0">
-                <a:solidFill>
-                  <a:srgbClr val="A5B5C9"/>
-                </a:solidFill>
-                <a:latin typeface="Aptos"/>
-              </a:rPr>
-              <a:t>Hiçbir akıllı model kullanılmadan sadece çoğunluk tahmini.</a:t>
-            </a:r>
+            <a:endParaRPr sz="1000" b="0" dirty="0">
+              <a:solidFill>
+                <a:srgbClr val="A5B5C9"/>
+              </a:solidFill>
+              <a:latin typeface="Aptos"/>
+            </a:endParaRPr>
           </a:p>
         </p:txBody>
       </p:sp>
@@ -9800,7 +9756,7 @@
         </p:nvSpPr>
         <p:spPr>
           <a:xfrm>
-            <a:off x="914400" y="3074676"/>
+            <a:off x="883920" y="2501796"/>
             <a:ext cx="2500000" cy="400000"/>
           </a:xfrm>
           <a:prstGeom prst="rect">
@@ -9835,7 +9791,7 @@
         </p:nvSpPr>
         <p:spPr>
           <a:xfrm>
-            <a:off x="3414400" y="3074676"/>
+            <a:off x="3383920" y="2501796"/>
             <a:ext cx="2000000" cy="400000"/>
           </a:xfrm>
           <a:prstGeom prst="rect">
@@ -9870,7 +9826,7 @@
         </p:nvSpPr>
         <p:spPr>
           <a:xfrm>
-            <a:off x="5414400" y="3074676"/>
+            <a:off x="5383920" y="2501796"/>
             <a:ext cx="5863200" cy="500000"/>
           </a:xfrm>
           <a:prstGeom prst="rect">
@@ -9951,7 +9907,7 @@
         </p:nvSpPr>
         <p:spPr>
           <a:xfrm>
-            <a:off x="914400" y="3694676"/>
+            <a:off x="883920" y="3121796"/>
             <a:ext cx="2500000" cy="400000"/>
           </a:xfrm>
           <a:prstGeom prst="rect">
@@ -9986,7 +9942,7 @@
         </p:nvSpPr>
         <p:spPr>
           <a:xfrm>
-            <a:off x="3414400" y="3694676"/>
+            <a:off x="3383920" y="3121796"/>
             <a:ext cx="2000000" cy="400000"/>
           </a:xfrm>
           <a:prstGeom prst="rect">
@@ -10021,7 +9977,7 @@
         </p:nvSpPr>
         <p:spPr>
           <a:xfrm>
-            <a:off x="5414400" y="3694676"/>
+            <a:off x="5383920" y="3121796"/>
             <a:ext cx="5863200" cy="500000"/>
           </a:xfrm>
           <a:prstGeom prst="rect">
@@ -10102,7 +10058,7 @@
         </p:nvSpPr>
         <p:spPr>
           <a:xfrm>
-            <a:off x="914400" y="4314676"/>
+            <a:off x="883920" y="3741796"/>
             <a:ext cx="2500000" cy="400000"/>
           </a:xfrm>
           <a:prstGeom prst="rect">
@@ -10137,7 +10093,7 @@
         </p:nvSpPr>
         <p:spPr>
           <a:xfrm>
-            <a:off x="3414400" y="4314676"/>
+            <a:off x="3383920" y="3741796"/>
             <a:ext cx="2000000" cy="400000"/>
           </a:xfrm>
           <a:prstGeom prst="rect">
@@ -10172,7 +10128,7 @@
         </p:nvSpPr>
         <p:spPr>
           <a:xfrm>
-            <a:off x="5414400" y="4314676"/>
+            <a:off x="5383920" y="3741796"/>
             <a:ext cx="5863200" cy="500000"/>
           </a:xfrm>
           <a:prstGeom prst="rect">
@@ -10201,59 +10157,13 @@
       </p:sp>
       <p:sp>
         <p:nvSpPr>
-          <p:cNvPr id="125" name="Callout"/>
-          <p:cNvSpPr/>
-          <p:nvPr/>
-        </p:nvSpPr>
-        <p:spPr>
-          <a:xfrm>
-            <a:off x="914400" y="4903236"/>
-            <a:ext cx="10332720" cy="502920"/>
-          </a:xfrm>
-          <a:prstGeom prst="roundRect">
-            <a:avLst/>
-          </a:prstGeom>
-          <a:solidFill>
-            <a:srgbClr val="182B45"/>
-          </a:solidFill>
-          <a:ln>
-            <a:solidFill>
-              <a:srgbClr val="182B45"/>
-            </a:solidFill>
-          </a:ln>
-        </p:spPr>
-        <p:style>
-          <a:lnRef idx="1">
-            <a:schemeClr val="accent1"/>
-          </a:lnRef>
-          <a:fillRef idx="3">
-            <a:schemeClr val="accent1"/>
-          </a:fillRef>
-          <a:effectRef idx="2">
-            <a:schemeClr val="accent1"/>
-          </a:effectRef>
-          <a:fontRef idx="minor">
-            <a:schemeClr val="lt1"/>
-          </a:fontRef>
-        </p:style>
-        <p:txBody>
-          <a:bodyPr rtlCol="0" anchor="ctr"/>
-          <a:lstStyle/>
-          <a:p>
-            <a:pPr algn="ctr"/>
-            <a:endParaRPr/>
-          </a:p>
-        </p:txBody>
-      </p:sp>
-      <p:sp>
-        <p:nvSpPr>
           <p:cNvPr id="126" name="CalloutText"/>
           <p:cNvSpPr txBox="1"/>
           <p:nvPr/>
         </p:nvSpPr>
         <p:spPr>
           <a:xfrm>
-            <a:off x="1097280" y="5058684"/>
+            <a:off x="994643" y="4384294"/>
             <a:ext cx="9966960" cy="182880"/>
           </a:xfrm>
           <a:prstGeom prst="rect">
@@ -11138,8 +11048,8 @@
           <p:nvPr/>
         </p:nvSpPr>
         <p:spPr>
-          <a:xfrm>
-            <a:off x="905800" y="4467360"/>
+          <a:xfrm rot="16200000">
+            <a:off x="-14400" y="3465507"/>
             <a:ext cx="2960000" cy="220000"/>
           </a:xfrm>
           <a:prstGeom prst="rect">
@@ -11155,13 +11065,31 @@
           <a:p>
             <a:pPr algn="ctr"/>
             <a:r>
+              <a:rPr sz="850" b="0" dirty="0" err="1" smtClean="0">
+                <a:solidFill>
+                  <a:srgbClr val="A5B5C9"/>
+                </a:solidFill>
+                <a:latin typeface="Aptos"/>
+              </a:rPr>
+              <a:t>Gerçek</a:t>
+            </a:r>
+            <a:r>
+              <a:rPr sz="850" b="0" dirty="0" smtClean="0">
+                <a:solidFill>
+                  <a:srgbClr val="A5B5C9"/>
+                </a:solidFill>
+                <a:latin typeface="Aptos"/>
+              </a:rPr>
+              <a:t> </a:t>
+            </a:r>
+            <a:r>
               <a:rPr sz="850" b="0" dirty="0">
                 <a:solidFill>
                   <a:srgbClr val="A5B5C9"/>
                 </a:solidFill>
                 <a:latin typeface="Aptos"/>
               </a:rPr>
-              <a:t>Satır: Gerçek Değer</a:t>
+              <a:t>Değer</a:t>
             </a:r>
           </a:p>
         </p:txBody>
@@ -12511,7 +12439,7 @@
         </p:nvSpPr>
         <p:spPr>
           <a:xfrm>
-            <a:off x="685800" y="5468112"/>
+            <a:off x="883136" y="5157170"/>
             <a:ext cx="3246120" cy="502920"/>
           </a:xfrm>
           <a:prstGeom prst="rect">
@@ -12534,13 +12462,202 @@
               </a:spcAft>
             </a:pPr>
             <a:r>
-              <a:rPr sz="1050">
+              <a:rPr sz="1050" dirty="0" err="1">
                 <a:solidFill>
                   <a:srgbClr val="B8C4D6"/>
                 </a:solidFill>
                 <a:latin typeface="Aptos"/>
               </a:rPr>
-              <a:t>Yolcunun hayatta kalma durumunu %79,85 doğrulukla tahmin etti; dengeli bir sonuç verdi.</a:t>
+              <a:t>Yolcunun</a:t>
+            </a:r>
+            <a:r>
+              <a:rPr sz="1050" dirty="0">
+                <a:solidFill>
+                  <a:srgbClr val="B8C4D6"/>
+                </a:solidFill>
+                <a:latin typeface="Aptos"/>
+              </a:rPr>
+              <a:t> </a:t>
+            </a:r>
+            <a:r>
+              <a:rPr sz="1050" dirty="0" err="1">
+                <a:solidFill>
+                  <a:srgbClr val="B8C4D6"/>
+                </a:solidFill>
+                <a:latin typeface="Aptos"/>
+              </a:rPr>
+              <a:t>hayatta</a:t>
+            </a:r>
+            <a:r>
+              <a:rPr sz="1050" dirty="0">
+                <a:solidFill>
+                  <a:srgbClr val="B8C4D6"/>
+                </a:solidFill>
+                <a:latin typeface="Aptos"/>
+              </a:rPr>
+              <a:t> </a:t>
+            </a:r>
+            <a:r>
+              <a:rPr sz="1050" dirty="0" err="1">
+                <a:solidFill>
+                  <a:srgbClr val="B8C4D6"/>
+                </a:solidFill>
+                <a:latin typeface="Aptos"/>
+              </a:rPr>
+              <a:t>kalma</a:t>
+            </a:r>
+            <a:r>
+              <a:rPr sz="1050" dirty="0">
+                <a:solidFill>
+                  <a:srgbClr val="B8C4D6"/>
+                </a:solidFill>
+                <a:latin typeface="Aptos"/>
+              </a:rPr>
+              <a:t> </a:t>
+            </a:r>
+            <a:r>
+              <a:rPr sz="1050" dirty="0" err="1">
+                <a:solidFill>
+                  <a:srgbClr val="B8C4D6"/>
+                </a:solidFill>
+                <a:latin typeface="Aptos"/>
+              </a:rPr>
+              <a:t>durumunu</a:t>
+            </a:r>
+            <a:r>
+              <a:rPr sz="1050" dirty="0">
+                <a:solidFill>
+                  <a:srgbClr val="B8C4D6"/>
+                </a:solidFill>
+                <a:latin typeface="Aptos"/>
+              </a:rPr>
+              <a:t> %79,85 </a:t>
+            </a:r>
+            <a:r>
+              <a:rPr sz="1050" dirty="0" err="1">
+                <a:solidFill>
+                  <a:srgbClr val="B8C4D6"/>
+                </a:solidFill>
+                <a:latin typeface="Aptos"/>
+              </a:rPr>
+              <a:t>doğrulukla</a:t>
+            </a:r>
+            <a:r>
+              <a:rPr sz="1050" dirty="0">
+                <a:solidFill>
+                  <a:srgbClr val="B8C4D6"/>
+                </a:solidFill>
+                <a:latin typeface="Aptos"/>
+              </a:rPr>
+              <a:t> </a:t>
+            </a:r>
+            <a:r>
+              <a:rPr sz="1050" dirty="0" err="1">
+                <a:solidFill>
+                  <a:srgbClr val="B8C4D6"/>
+                </a:solidFill>
+                <a:latin typeface="Aptos"/>
+              </a:rPr>
+              <a:t>tahmin</a:t>
+            </a:r>
+            <a:r>
+              <a:rPr sz="1050" dirty="0">
+                <a:solidFill>
+                  <a:srgbClr val="B8C4D6"/>
+                </a:solidFill>
+                <a:latin typeface="Aptos"/>
+              </a:rPr>
+              <a:t> </a:t>
+            </a:r>
+            <a:r>
+              <a:rPr sz="1050" dirty="0" err="1">
+                <a:solidFill>
+                  <a:srgbClr val="B8C4D6"/>
+                </a:solidFill>
+                <a:latin typeface="Aptos"/>
+              </a:rPr>
+              <a:t>etti</a:t>
+            </a:r>
+            <a:r>
+              <a:rPr sz="1050" dirty="0">
+                <a:solidFill>
+                  <a:srgbClr val="B8C4D6"/>
+                </a:solidFill>
+                <a:latin typeface="Aptos"/>
+              </a:rPr>
+              <a:t>; </a:t>
+            </a:r>
+            <a:r>
+              <a:rPr sz="1050" dirty="0" err="1">
+                <a:solidFill>
+                  <a:srgbClr val="B8C4D6"/>
+                </a:solidFill>
+                <a:latin typeface="Aptos"/>
+              </a:rPr>
+              <a:t>dengeli</a:t>
+            </a:r>
+            <a:r>
+              <a:rPr sz="1050" dirty="0">
+                <a:solidFill>
+                  <a:srgbClr val="B8C4D6"/>
+                </a:solidFill>
+                <a:latin typeface="Aptos"/>
+              </a:rPr>
+              <a:t> </a:t>
+            </a:r>
+            <a:r>
+              <a:rPr sz="1050" dirty="0" err="1">
+                <a:solidFill>
+                  <a:srgbClr val="B8C4D6"/>
+                </a:solidFill>
+                <a:latin typeface="Aptos"/>
+              </a:rPr>
+              <a:t>bir</a:t>
+            </a:r>
+            <a:r>
+              <a:rPr sz="1050" dirty="0">
+                <a:solidFill>
+                  <a:srgbClr val="B8C4D6"/>
+                </a:solidFill>
+                <a:latin typeface="Aptos"/>
+              </a:rPr>
+              <a:t> </a:t>
+            </a:r>
+            <a:r>
+              <a:rPr sz="1050" dirty="0" err="1">
+                <a:solidFill>
+                  <a:srgbClr val="B8C4D6"/>
+                </a:solidFill>
+                <a:latin typeface="Aptos"/>
+              </a:rPr>
+              <a:t>sonuç</a:t>
+            </a:r>
+            <a:r>
+              <a:rPr sz="1050" dirty="0">
+                <a:solidFill>
+                  <a:srgbClr val="B8C4D6"/>
+                </a:solidFill>
+                <a:latin typeface="Aptos"/>
+              </a:rPr>
+              <a:t> </a:t>
+            </a:r>
+            <a:r>
+              <a:rPr sz="1050" dirty="0" err="1">
+                <a:solidFill>
+                  <a:srgbClr val="B8C4D6"/>
+                </a:solidFill>
+                <a:latin typeface="Aptos"/>
+              </a:rPr>
+              <a:t>verdi</a:t>
+            </a:r>
+            <a:r>
+              <a:rPr sz="1050" dirty="0">
+                <a:solidFill>
+                  <a:srgbClr val="B8C4D6"/>
+                </a:solidFill>
+                <a:latin typeface="Aptos"/>
+              </a:rPr>
+              <a:t>.</a:t>
             </a:r>
           </a:p>
         </p:txBody>
@@ -12553,7 +12670,7 @@
         </p:nvSpPr>
         <p:spPr>
           <a:xfrm>
-            <a:off x="4352544" y="5468112"/>
+            <a:off x="4608924" y="5192060"/>
             <a:ext cx="3246120" cy="502920"/>
           </a:xfrm>
           <a:prstGeom prst="rect">
@@ -12576,13 +12693,184 @@
               </a:spcAft>
             </a:pPr>
             <a:r>
-              <a:rPr sz="1050">
+              <a:rPr sz="1050" dirty="0" err="1">
                 <a:solidFill>
                   <a:srgbClr val="B8C4D6"/>
                 </a:solidFill>
                 <a:latin typeface="Aptos"/>
               </a:rPr>
-              <a:t>Kural tabanlı bu model %74,63 doğrulukla üç model arasında daha düşük performans gösterdi.</a:t>
+              <a:t>Kural</a:t>
+            </a:r>
+            <a:r>
+              <a:rPr sz="1050" dirty="0">
+                <a:solidFill>
+                  <a:srgbClr val="B8C4D6"/>
+                </a:solidFill>
+                <a:latin typeface="Aptos"/>
+              </a:rPr>
+              <a:t> </a:t>
+            </a:r>
+            <a:r>
+              <a:rPr sz="1050" dirty="0" err="1">
+                <a:solidFill>
+                  <a:srgbClr val="B8C4D6"/>
+                </a:solidFill>
+                <a:latin typeface="Aptos"/>
+              </a:rPr>
+              <a:t>tabanlı</a:t>
+            </a:r>
+            <a:r>
+              <a:rPr sz="1050" dirty="0">
+                <a:solidFill>
+                  <a:srgbClr val="B8C4D6"/>
+                </a:solidFill>
+                <a:latin typeface="Aptos"/>
+              </a:rPr>
+              <a:t> </a:t>
+            </a:r>
+            <a:r>
+              <a:rPr sz="1050" dirty="0" err="1">
+                <a:solidFill>
+                  <a:srgbClr val="B8C4D6"/>
+                </a:solidFill>
+                <a:latin typeface="Aptos"/>
+              </a:rPr>
+              <a:t>bu</a:t>
+            </a:r>
+            <a:r>
+              <a:rPr sz="1050" dirty="0">
+                <a:solidFill>
+                  <a:srgbClr val="B8C4D6"/>
+                </a:solidFill>
+                <a:latin typeface="Aptos"/>
+              </a:rPr>
+              <a:t> model %74,63 </a:t>
+            </a:r>
+            <a:r>
+              <a:rPr sz="1050" dirty="0" err="1">
+                <a:solidFill>
+                  <a:srgbClr val="B8C4D6"/>
+                </a:solidFill>
+                <a:latin typeface="Aptos"/>
+              </a:rPr>
+              <a:t>doğrulukla</a:t>
+            </a:r>
+            <a:r>
+              <a:rPr sz="1050" dirty="0">
+                <a:solidFill>
+                  <a:srgbClr val="B8C4D6"/>
+                </a:solidFill>
+                <a:latin typeface="Aptos"/>
+              </a:rPr>
+              <a:t> </a:t>
+            </a:r>
+            <a:r>
+              <a:rPr sz="1050" dirty="0" err="1">
+                <a:solidFill>
+                  <a:srgbClr val="B8C4D6"/>
+                </a:solidFill>
+                <a:latin typeface="Aptos"/>
+              </a:rPr>
+              <a:t>üç</a:t>
+            </a:r>
+            <a:r>
+              <a:rPr sz="1050" dirty="0">
+                <a:solidFill>
+                  <a:srgbClr val="B8C4D6"/>
+                </a:solidFill>
+                <a:latin typeface="Aptos"/>
+              </a:rPr>
+              <a:t> model </a:t>
+            </a:r>
+            <a:r>
+              <a:rPr sz="1050" dirty="0" err="1">
+                <a:solidFill>
+                  <a:srgbClr val="B8C4D6"/>
+                </a:solidFill>
+                <a:latin typeface="Aptos"/>
+              </a:rPr>
+              <a:t>arasında</a:t>
+            </a:r>
+            <a:r>
+              <a:rPr sz="1050" dirty="0">
+                <a:solidFill>
+                  <a:srgbClr val="B8C4D6"/>
+                </a:solidFill>
+                <a:latin typeface="Aptos"/>
+              </a:rPr>
+              <a:t> </a:t>
+            </a:r>
+            <a:r>
+              <a:rPr sz="1050" dirty="0" err="1">
+                <a:solidFill>
+                  <a:srgbClr val="B8C4D6"/>
+                </a:solidFill>
+                <a:latin typeface="Aptos"/>
+              </a:rPr>
+              <a:t>daha</a:t>
+            </a:r>
+            <a:r>
+              <a:rPr sz="1050" dirty="0">
+                <a:solidFill>
+                  <a:srgbClr val="B8C4D6"/>
+                </a:solidFill>
+                <a:latin typeface="Aptos"/>
+              </a:rPr>
+              <a:t> </a:t>
+            </a:r>
+            <a:r>
+              <a:rPr sz="1050" dirty="0" err="1">
+                <a:solidFill>
+                  <a:srgbClr val="B8C4D6"/>
+                </a:solidFill>
+                <a:latin typeface="Aptos"/>
+              </a:rPr>
+              <a:t>düşük</a:t>
+            </a:r>
+            <a:r>
+              <a:rPr sz="1050" dirty="0">
+                <a:solidFill>
+                  <a:srgbClr val="B8C4D6"/>
+                </a:solidFill>
+                <a:latin typeface="Aptos"/>
+              </a:rPr>
+              <a:t> </a:t>
+            </a:r>
+            <a:r>
+              <a:rPr sz="1050" dirty="0" err="1">
+                <a:solidFill>
+                  <a:srgbClr val="B8C4D6"/>
+                </a:solidFill>
+                <a:latin typeface="Aptos"/>
+              </a:rPr>
+              <a:t>performans</a:t>
+            </a:r>
+            <a:r>
+              <a:rPr sz="1050" dirty="0">
+                <a:solidFill>
+                  <a:srgbClr val="B8C4D6"/>
+                </a:solidFill>
+                <a:latin typeface="Aptos"/>
+              </a:rPr>
+              <a:t> </a:t>
+            </a:r>
+            <a:r>
+              <a:rPr sz="1050" dirty="0" err="1">
+                <a:solidFill>
+                  <a:srgbClr val="B8C4D6"/>
+                </a:solidFill>
+                <a:latin typeface="Aptos"/>
+              </a:rPr>
+              <a:t>gösterdi</a:t>
+            </a:r>
+            <a:r>
+              <a:rPr sz="1050" dirty="0">
+                <a:solidFill>
+                  <a:srgbClr val="B8C4D6"/>
+                </a:solidFill>
+                <a:latin typeface="Aptos"/>
+              </a:rPr>
+              <a:t>.</a:t>
             </a:r>
           </a:p>
         </p:txBody>
@@ -12595,7 +12883,7 @@
         </p:nvSpPr>
         <p:spPr>
           <a:xfrm>
-            <a:off x="8010144" y="5468112"/>
+            <a:off x="8223864" y="5157839"/>
             <a:ext cx="3246120" cy="502920"/>
           </a:xfrm>
           <a:prstGeom prst="rect">
@@ -12618,13 +12906,290 @@
               </a:spcAft>
             </a:pPr>
             <a:r>
-              <a:rPr sz="1050">
+              <a:rPr sz="1050" dirty="0" err="1">
                 <a:solidFill>
                   <a:srgbClr val="B8C4D6"/>
                 </a:solidFill>
                 <a:latin typeface="Aptos"/>
               </a:rPr>
-              <a:t>Birden fazla karar ağacını birleştirerek %80,22 ile en yüksek doğruluğa ulaştı.</a:t>
+              <a:t>Birden</a:t>
+            </a:r>
+            <a:r>
+              <a:rPr sz="1050" dirty="0">
+                <a:solidFill>
+                  <a:srgbClr val="B8C4D6"/>
+                </a:solidFill>
+                <a:latin typeface="Aptos"/>
+              </a:rPr>
+              <a:t> </a:t>
+            </a:r>
+            <a:r>
+              <a:rPr sz="1050" dirty="0" err="1">
+                <a:solidFill>
+                  <a:srgbClr val="B8C4D6"/>
+                </a:solidFill>
+                <a:latin typeface="Aptos"/>
+              </a:rPr>
+              <a:t>fazla</a:t>
+            </a:r>
+            <a:r>
+              <a:rPr sz="1050" dirty="0">
+                <a:solidFill>
+                  <a:srgbClr val="B8C4D6"/>
+                </a:solidFill>
+                <a:latin typeface="Aptos"/>
+              </a:rPr>
+              <a:t> </a:t>
+            </a:r>
+            <a:r>
+              <a:rPr sz="1050" dirty="0" err="1">
+                <a:solidFill>
+                  <a:srgbClr val="B8C4D6"/>
+                </a:solidFill>
+                <a:latin typeface="Aptos"/>
+              </a:rPr>
+              <a:t>karar</a:t>
+            </a:r>
+            <a:r>
+              <a:rPr sz="1050" dirty="0">
+                <a:solidFill>
+                  <a:srgbClr val="B8C4D6"/>
+                </a:solidFill>
+                <a:latin typeface="Aptos"/>
+              </a:rPr>
+              <a:t> </a:t>
+            </a:r>
+            <a:r>
+              <a:rPr sz="1050" dirty="0" err="1">
+                <a:solidFill>
+                  <a:srgbClr val="B8C4D6"/>
+                </a:solidFill>
+                <a:latin typeface="Aptos"/>
+              </a:rPr>
+              <a:t>ağacını</a:t>
+            </a:r>
+            <a:r>
+              <a:rPr sz="1050" dirty="0">
+                <a:solidFill>
+                  <a:srgbClr val="B8C4D6"/>
+                </a:solidFill>
+                <a:latin typeface="Aptos"/>
+              </a:rPr>
+              <a:t> </a:t>
+            </a:r>
+            <a:r>
+              <a:rPr sz="1050" dirty="0" err="1">
+                <a:solidFill>
+                  <a:srgbClr val="B8C4D6"/>
+                </a:solidFill>
+                <a:latin typeface="Aptos"/>
+              </a:rPr>
+              <a:t>birleştirerek</a:t>
+            </a:r>
+            <a:r>
+              <a:rPr sz="1050" dirty="0">
+                <a:solidFill>
+                  <a:srgbClr val="B8C4D6"/>
+                </a:solidFill>
+                <a:latin typeface="Aptos"/>
+              </a:rPr>
+              <a:t> %80,22 </a:t>
+            </a:r>
+            <a:r>
+              <a:rPr sz="1050" dirty="0" err="1">
+                <a:solidFill>
+                  <a:srgbClr val="B8C4D6"/>
+                </a:solidFill>
+                <a:latin typeface="Aptos"/>
+              </a:rPr>
+              <a:t>ile</a:t>
+            </a:r>
+            <a:r>
+              <a:rPr sz="1050" dirty="0">
+                <a:solidFill>
+                  <a:srgbClr val="B8C4D6"/>
+                </a:solidFill>
+                <a:latin typeface="Aptos"/>
+              </a:rPr>
+              <a:t> </a:t>
+            </a:r>
+            <a:r>
+              <a:rPr sz="1050" dirty="0" err="1">
+                <a:solidFill>
+                  <a:srgbClr val="B8C4D6"/>
+                </a:solidFill>
+                <a:latin typeface="Aptos"/>
+              </a:rPr>
+              <a:t>en</a:t>
+            </a:r>
+            <a:r>
+              <a:rPr sz="1050" dirty="0">
+                <a:solidFill>
+                  <a:srgbClr val="B8C4D6"/>
+                </a:solidFill>
+                <a:latin typeface="Aptos"/>
+              </a:rPr>
+              <a:t> </a:t>
+            </a:r>
+            <a:r>
+              <a:rPr sz="1050" dirty="0" err="1">
+                <a:solidFill>
+                  <a:srgbClr val="B8C4D6"/>
+                </a:solidFill>
+                <a:latin typeface="Aptos"/>
+              </a:rPr>
+              <a:t>yüksek</a:t>
+            </a:r>
+            <a:r>
+              <a:rPr sz="1050" dirty="0">
+                <a:solidFill>
+                  <a:srgbClr val="B8C4D6"/>
+                </a:solidFill>
+                <a:latin typeface="Aptos"/>
+              </a:rPr>
+              <a:t> </a:t>
+            </a:r>
+            <a:r>
+              <a:rPr sz="1050" dirty="0" err="1">
+                <a:solidFill>
+                  <a:srgbClr val="B8C4D6"/>
+                </a:solidFill>
+                <a:latin typeface="Aptos"/>
+              </a:rPr>
+              <a:t>doğruluğa</a:t>
+            </a:r>
+            <a:r>
+              <a:rPr sz="1050" dirty="0">
+                <a:solidFill>
+                  <a:srgbClr val="B8C4D6"/>
+                </a:solidFill>
+                <a:latin typeface="Aptos"/>
+              </a:rPr>
+              <a:t> </a:t>
+            </a:r>
+            <a:r>
+              <a:rPr sz="1050" dirty="0" err="1">
+                <a:solidFill>
+                  <a:srgbClr val="B8C4D6"/>
+                </a:solidFill>
+                <a:latin typeface="Aptos"/>
+              </a:rPr>
+              <a:t>ulaştı</a:t>
+            </a:r>
+            <a:r>
+              <a:rPr sz="1050" dirty="0">
+                <a:solidFill>
+                  <a:srgbClr val="B8C4D6"/>
+                </a:solidFill>
+                <a:latin typeface="Aptos"/>
+              </a:rPr>
+              <a:t>.</a:t>
+            </a:r>
+          </a:p>
+        </p:txBody>
+      </p:sp>
+      <p:sp>
+        <p:nvSpPr>
+          <p:cNvPr id="61" name="AxisY_Lojistik Regresyon"/>
+          <p:cNvSpPr txBox="1"/>
+          <p:nvPr/>
+        </p:nvSpPr>
+        <p:spPr>
+          <a:xfrm rot="16200000">
+            <a:off x="3695935" y="3308291"/>
+            <a:ext cx="2960000" cy="220000"/>
+          </a:xfrm>
+          <a:prstGeom prst="rect">
+            <a:avLst/>
+          </a:prstGeom>
+          <a:noFill/>
+        </p:spPr>
+        <p:txBody>
+          <a:bodyPr wrap="square" anchor="t">
+            <a:noAutofit/>
+          </a:bodyPr>
+          <a:lstStyle/>
+          <a:p>
+            <a:pPr algn="ctr"/>
+            <a:r>
+              <a:rPr sz="850" b="0" dirty="0" err="1" smtClean="0">
+                <a:solidFill>
+                  <a:srgbClr val="A5B5C9"/>
+                </a:solidFill>
+                <a:latin typeface="Aptos"/>
+              </a:rPr>
+              <a:t>Gerçek</a:t>
+            </a:r>
+            <a:r>
+              <a:rPr sz="850" b="0" dirty="0" smtClean="0">
+                <a:solidFill>
+                  <a:srgbClr val="A5B5C9"/>
+                </a:solidFill>
+                <a:latin typeface="Aptos"/>
+              </a:rPr>
+              <a:t> </a:t>
+            </a:r>
+            <a:r>
+              <a:rPr sz="850" b="0" dirty="0">
+                <a:solidFill>
+                  <a:srgbClr val="A5B5C9"/>
+                </a:solidFill>
+                <a:latin typeface="Aptos"/>
+              </a:rPr>
+              <a:t>Değer</a:t>
+            </a:r>
+          </a:p>
+        </p:txBody>
+      </p:sp>
+      <p:sp>
+        <p:nvSpPr>
+          <p:cNvPr id="64" name="AxisY_Lojistik Regresyon"/>
+          <p:cNvSpPr txBox="1"/>
+          <p:nvPr/>
+        </p:nvSpPr>
+        <p:spPr>
+          <a:xfrm rot="16200000">
+            <a:off x="7404760" y="3421878"/>
+            <a:ext cx="2960000" cy="220000"/>
+          </a:xfrm>
+          <a:prstGeom prst="rect">
+            <a:avLst/>
+          </a:prstGeom>
+          <a:noFill/>
+        </p:spPr>
+        <p:txBody>
+          <a:bodyPr wrap="square" anchor="t">
+            <a:noAutofit/>
+          </a:bodyPr>
+          <a:lstStyle/>
+          <a:p>
+            <a:pPr algn="ctr"/>
+            <a:r>
+              <a:rPr sz="850" b="0" dirty="0" err="1" smtClean="0">
+                <a:solidFill>
+                  <a:srgbClr val="A5B5C9"/>
+                </a:solidFill>
+                <a:latin typeface="Aptos"/>
+              </a:rPr>
+              <a:t>Gerçek</a:t>
+            </a:r>
+            <a:r>
+              <a:rPr sz="850" b="0" dirty="0" smtClean="0">
+                <a:solidFill>
+                  <a:srgbClr val="A5B5C9"/>
+                </a:solidFill>
+                <a:latin typeface="Aptos"/>
+              </a:rPr>
+              <a:t> </a:t>
+            </a:r>
+            <a:r>
+              <a:rPr sz="850" b="0" dirty="0">
+                <a:solidFill>
+                  <a:srgbClr val="A5B5C9"/>
+                </a:solidFill>
+                <a:latin typeface="Aptos"/>
+              </a:rPr>
+              <a:t>Değer</a:t>
             </a:r>
           </a:p>
         </p:txBody>
@@ -12896,7 +13461,7 @@
                 </a:solidFill>
                 <a:latin typeface="Aptos"/>
               </a:rPr>
-              <a:t>1. False Negative (Kaçırılan Kurtulanlar)</a:t>
+              <a:t>1. False Negative </a:t>
             </a:r>
           </a:p>
         </p:txBody>
@@ -12931,7 +13496,7 @@
             <a:r>
               <a:rPr sz="1100" b="1" i="0" dirty="0">
                 <a:solidFill>
-                  <a:srgbClr val="F5F8FC"/>
+                  <a:schemeClr val="bg1"/>
                 </a:solidFill>
                 <a:latin typeface="Aptos"/>
               </a:rPr>
@@ -12940,7 +13505,7 @@
             <a:r>
               <a:rPr sz="1100" b="0" i="0" dirty="0">
                 <a:solidFill>
-                  <a:srgbClr val="A5B5C9"/>
+                  <a:schemeClr val="bg1"/>
                 </a:solidFill>
                 <a:latin typeface="Aptos"/>
               </a:rPr>
@@ -12949,7 +13514,7 @@
             <a:r>
               <a:rPr sz="1100" b="0" i="1" dirty="0">
                 <a:solidFill>
-                  <a:srgbClr val="A5B5C9"/>
+                  <a:schemeClr val="bg1"/>
                 </a:solidFill>
                 <a:latin typeface="Aptos"/>
               </a:rPr>
@@ -12958,25 +13523,61 @@
             <a:r>
               <a:rPr sz="1100" b="0" i="0" dirty="0">
                 <a:solidFill>
-                  <a:srgbClr val="A5B5C9"/>
-                </a:solidFill>
-                <a:latin typeface="Aptos"/>
-              </a:rPr>
-              <a:t> gözüyle baktığı, ancak şans eseri veya kaotik olaylar sonucu </a:t>
+                  <a:schemeClr val="bg1"/>
+                </a:solidFill>
+                <a:latin typeface="Aptos"/>
+              </a:rPr>
+              <a:t> gözüyle baktığı, </a:t>
+            </a:r>
+            <a:r>
+              <a:rPr sz="1100" b="0" i="0" dirty="0" err="1">
+                <a:solidFill>
+                  <a:schemeClr val="bg1"/>
+                </a:solidFill>
+                <a:latin typeface="Aptos"/>
+              </a:rPr>
+              <a:t>ancak</a:t>
+            </a:r>
+            <a:r>
+              <a:rPr sz="1100" b="0" i="0" dirty="0">
+                <a:solidFill>
+                  <a:schemeClr val="bg1"/>
+                </a:solidFill>
+                <a:latin typeface="Aptos"/>
+              </a:rPr>
+              <a:t> </a:t>
+            </a:r>
+            <a:r>
+              <a:rPr sz="1100" b="1" i="0" dirty="0" err="1" smtClean="0">
+                <a:solidFill>
+                  <a:schemeClr val="bg1"/>
+                </a:solidFill>
+                <a:latin typeface="Aptos"/>
+              </a:rPr>
+              <a:t>hayatta</a:t>
+            </a:r>
+            <a:r>
+              <a:rPr sz="1100" b="1" i="0" dirty="0" smtClean="0">
+                <a:solidFill>
+                  <a:schemeClr val="bg1"/>
+                </a:solidFill>
+                <a:latin typeface="Aptos"/>
+              </a:rPr>
+              <a:t> </a:t>
             </a:r>
             <a:r>
               <a:rPr sz="1100" b="1" i="0" dirty="0">
                 <a:solidFill>
-                  <a:srgbClr val="F5F8FC"/>
-                </a:solidFill>
-                <a:latin typeface="Aptos"/>
-              </a:rPr>
-              <a:t>hayatta kalmayı başaran</a:t>
+                  <a:schemeClr val="bg1"/>
+                </a:solidFill>
+                <a:latin typeface="Aptos"/>
+              </a:rPr>
+              <a:t>kalmayı başaran</a:t>
             </a:r>
             <a:r>
               <a:rPr sz="1100" b="0" i="0" dirty="0">
                 <a:solidFill>
-                  <a:srgbClr val="A5B5C9"/>
+                  <a:schemeClr val="bg1"/>
                 </a:solidFill>
                 <a:latin typeface="Aptos"/>
               </a:rPr>
@@ -12992,7 +13593,7 @@
             <a:r>
               <a:rPr sz="1000" b="1" i="0" dirty="0">
                 <a:solidFill>
-                  <a:srgbClr val="F5F8FC"/>
+                  <a:schemeClr val="bg1"/>
                 </a:solidFill>
                 <a:latin typeface="Aptos"/>
               </a:rPr>
@@ -13001,7 +13602,7 @@
             <a:r>
               <a:rPr sz="1000" b="0" i="0" dirty="0">
                 <a:solidFill>
-                  <a:srgbClr val="A5B5C9"/>
+                  <a:schemeClr val="bg1"/>
                 </a:solidFill>
                 <a:latin typeface="Aptos"/>
               </a:rPr>
@@ -13086,8 +13687,23 @@
                 </a:solidFill>
                 <a:latin typeface="Aptos"/>
               </a:rPr>
-              <a:t>2. False Positive (Yalancı Alarmlar)</a:t>
-            </a:r>
+              <a:t>2. False </a:t>
+            </a:r>
+            <a:r>
+              <a:rPr sz="1500" b="1" i="0" dirty="0" smtClean="0">
+                <a:solidFill>
+                  <a:srgbClr val="46AAFF"/>
+                </a:solidFill>
+                <a:latin typeface="Aptos"/>
+              </a:rPr>
+              <a:t>Positive</a:t>
+            </a:r>
+            <a:endParaRPr sz="1500" b="1" i="0" dirty="0">
+              <a:solidFill>
+                <a:srgbClr val="46AAFF"/>
+              </a:solidFill>
+              <a:latin typeface="Aptos"/>
+            </a:endParaRPr>
           </a:p>
         </p:txBody>
       </p:sp>
@@ -13121,7 +13737,7 @@
             <a:r>
               <a:rPr sz="1100" b="1" i="0" dirty="0">
                 <a:solidFill>
-                  <a:srgbClr val="F5F8FC"/>
+                  <a:schemeClr val="bg1"/>
                 </a:solidFill>
                 <a:latin typeface="Aptos"/>
               </a:rPr>
@@ -13130,73 +13746,137 @@
             <a:r>
               <a:rPr sz="1100" b="0" i="0" dirty="0">
                 <a:solidFill>
+                  <a:schemeClr val="bg1"/>
+                </a:solidFill>
+                <a:latin typeface="Aptos"/>
+              </a:rPr>
+              <a:t>Modelin </a:t>
+            </a:r>
+            <a:r>
+              <a:rPr sz="1100" b="0" i="1" dirty="0">
+                <a:solidFill>
+                  <a:schemeClr val="bg1"/>
+                </a:solidFill>
+                <a:latin typeface="Aptos"/>
+              </a:rPr>
+              <a:t>“Kesin Kurtulacak (1)”</a:t>
+            </a:r>
+            <a:r>
+              <a:rPr sz="1100" b="0" i="0" dirty="0">
+                <a:solidFill>
+                  <a:schemeClr val="bg1"/>
+                </a:solidFill>
+                <a:latin typeface="Aptos"/>
+              </a:rPr>
+              <a:t> dediği, </a:t>
+            </a:r>
+            <a:r>
+              <a:rPr sz="1100" b="0" i="0" dirty="0" err="1">
+                <a:solidFill>
+                  <a:schemeClr val="bg1"/>
+                </a:solidFill>
+                <a:latin typeface="Aptos"/>
+              </a:rPr>
+              <a:t>ancak</a:t>
+            </a:r>
+            <a:r>
+              <a:rPr sz="1100" b="0" i="0" dirty="0">
+                <a:solidFill>
+                  <a:schemeClr val="bg1"/>
+                </a:solidFill>
+                <a:latin typeface="Aptos"/>
+              </a:rPr>
+              <a:t> </a:t>
+            </a:r>
+            <a:r>
+              <a:rPr sz="1100" b="1" i="0" dirty="0" err="1" smtClean="0">
+                <a:solidFill>
+                  <a:schemeClr val="bg1"/>
+                </a:solidFill>
+                <a:latin typeface="Aptos"/>
+              </a:rPr>
+              <a:t>vefat</a:t>
+            </a:r>
+            <a:r>
+              <a:rPr sz="1100" b="1" i="0" dirty="0" smtClean="0">
+                <a:solidFill>
+                  <a:schemeClr val="bg1"/>
+                </a:solidFill>
+                <a:latin typeface="Aptos"/>
+              </a:rPr>
+              <a:t> </a:t>
+            </a:r>
+            <a:r>
+              <a:rPr sz="1100" b="1" i="0" dirty="0">
+                <a:solidFill>
+                  <a:schemeClr val="bg1"/>
+                </a:solidFill>
+                <a:latin typeface="Aptos"/>
+              </a:rPr>
+              <a:t>eden</a:t>
+            </a:r>
+            <a:r>
+              <a:rPr sz="1100" b="0" i="0" dirty="0">
+                <a:solidFill>
+                  <a:schemeClr val="bg1"/>
+                </a:solidFill>
+                <a:latin typeface="Aptos"/>
+              </a:rPr>
+              <a:t> </a:t>
+            </a:r>
+            <a:r>
+              <a:rPr sz="1100" b="0" i="0" dirty="0" err="1">
+                <a:solidFill>
+                  <a:schemeClr val="bg1"/>
+                </a:solidFill>
+                <a:latin typeface="Aptos"/>
+              </a:rPr>
+              <a:t>yolculardır</a:t>
+            </a:r>
+            <a:r>
+              <a:rPr sz="1100" b="0" i="0" dirty="0" smtClean="0">
+                <a:solidFill>
                   <a:srgbClr val="A5B5C9"/>
                 </a:solidFill>
                 <a:latin typeface="Aptos"/>
               </a:rPr>
-              <a:t>Modelin </a:t>
-            </a:r>
-            <a:r>
-              <a:rPr sz="1100" b="0" i="1" dirty="0">
-                <a:solidFill>
-                  <a:srgbClr val="A5B5C9"/>
-                </a:solidFill>
-                <a:latin typeface="Aptos"/>
-              </a:rPr>
-              <a:t>“Kesin Kurtulacak (1)”</a:t>
-            </a:r>
-            <a:r>
-              <a:rPr sz="1100" b="0" i="0" dirty="0">
-                <a:solidFill>
-                  <a:srgbClr val="A5B5C9"/>
-                </a:solidFill>
-                <a:latin typeface="Aptos"/>
-              </a:rPr>
-              <a:t> dediği, ancak filika yetersizliği ve kaos yüzünden </a:t>
-            </a:r>
-            <a:r>
-              <a:rPr sz="1100" b="1" i="0" dirty="0">
-                <a:solidFill>
-                  <a:srgbClr val="F5F8FC"/>
-                </a:solidFill>
-                <a:latin typeface="Aptos"/>
-              </a:rPr>
-              <a:t>maalesef vefat eden</a:t>
-            </a:r>
-            <a:r>
-              <a:rPr sz="1100" b="0" i="0" dirty="0">
-                <a:solidFill>
-                  <a:srgbClr val="A5B5C9"/>
-                </a:solidFill>
-                <a:latin typeface="Aptos"/>
-              </a:rPr>
-              <a:t> yolculardır.</a:t>
-            </a:r>
-          </a:p>
-          <a:p>
-            <a:pPr algn="l">
+              <a:t>.</a:t>
+            </a:r>
+            <a:endParaRPr lang="tr-TR" sz="1100" b="0" i="0" dirty="0" smtClean="0">
+              <a:solidFill>
+                <a:srgbClr val="A5B5C9"/>
+              </a:solidFill>
+              <a:latin typeface="Aptos"/>
+            </a:endParaRPr>
+          </a:p>
+          <a:p>
+            <a:pPr>
               <a:spcAft>
                 <a:spcPts val="1600"/>
               </a:spcAft>
             </a:pPr>
             <a:r>
-              <a:rPr sz="1000" b="1" i="0" dirty="0">
-                <a:solidFill>
-                  <a:srgbClr val="F5F8FC"/>
-                </a:solidFill>
-                <a:latin typeface="Aptos"/>
-              </a:rPr>
-              <a:t>Neden Zorlanıyor? </a:t>
-            </a:r>
-            <a:r>
-              <a:rPr sz="1000" b="0" i="0" dirty="0">
-                <a:solidFill>
-                  <a:srgbClr val="A5B5C9"/>
-                </a:solidFill>
-                <a:latin typeface="Aptos"/>
-              </a:rPr>
-              <a:t>Zengin veya öncelikli demografik grupta olmalarına rağmen facianın trajik koşulları nedeniyle kurtulamayan talihsiz kayıplardır.</a:t>
-            </a:r>
+              <a:rPr lang="tr-TR" sz="1100" b="1" dirty="0">
+                <a:solidFill>
+                  <a:schemeClr val="bg1"/>
+                </a:solidFill>
+              </a:rPr>
+              <a:t>Neden Zorlanıyor?</a:t>
+            </a:r>
+            <a:r>
+              <a:rPr lang="tr-TR" sz="1100" dirty="0">
+                <a:solidFill>
+                  <a:schemeClr val="bg1"/>
+                </a:solidFill>
+              </a:rPr>
+              <a:t> Model bu kişileri demografik özelliklerine dayanarak kurtulacak olarak sınıflandırmış olsa da, kazanın genel karmaşası ve ani gelişen faktörler nedeniyle model bu sapmaları yakalayamamıştır.</a:t>
+            </a:r>
+            <a:endParaRPr sz="1100" b="0" i="0" dirty="0">
+              <a:solidFill>
+                <a:schemeClr val="bg1"/>
+              </a:solidFill>
+              <a:latin typeface="Aptos"/>
+            </a:endParaRPr>
           </a:p>
         </p:txBody>
       </p:sp>
@@ -13251,7 +13931,7 @@
 </file>
 
 <file path=ppt/slides/slide9.xml><?xml version="1.0" encoding="utf-8"?>
-<p:sld xmlns:a="http://schemas.openxmlformats.org/drawingml/2006/main" xmlns:p="http://schemas.openxmlformats.org/presentationml/2006/main" xmlns:r="http://schemas.openxmlformats.org/officeDocument/2006/relationships">
+<p:sld xmlns:a="http://schemas.openxmlformats.org/drawingml/2006/main" xmlns:r="http://schemas.openxmlformats.org/officeDocument/2006/relationships" xmlns:p="http://schemas.openxmlformats.org/presentationml/2006/main">
   <p:cSld>
     <p:bg>
       <p:bgPr>
@@ -13267,7 +13947,14 @@
         <p:cNvGrpSpPr/>
         <p:nvPr/>
       </p:nvGrpSpPr>
-      <p:grpSpPr/>
+      <p:grpSpPr>
+        <a:xfrm>
+          <a:off x="0" y="0"/>
+          <a:ext cx="0" cy="0"/>
+          <a:chOff x="0" y="0"/>
+          <a:chExt cx="0" cy="0"/>
+        </a:xfrm>
+      </p:grpSpPr>
       <p:sp>
         <p:nvSpPr>
           <p:cNvPr id="2" name="TextBox 1"/>
@@ -13413,6 +14100,7 @@
           <a:lstStyle/>
           <a:p>
             <a:pPr algn="ctr"/>
+            <a:endParaRPr/>
           </a:p>
         </p:txBody>
       </p:sp>
@@ -13458,6 +14146,7 @@
           <a:lstStyle/>
           <a:p>
             <a:pPr algn="ctr"/>
+            <a:endParaRPr/>
           </a:p>
         </p:txBody>
       </p:sp>
@@ -13503,6 +14192,7 @@
           <a:lstStyle/>
           <a:p>
             <a:pPr algn="ctr"/>
+            <a:endParaRPr/>
           </a:p>
         </p:txBody>
       </p:sp>
@@ -13688,6 +14378,7 @@
           <a:lstStyle/>
           <a:p>
             <a:pPr algn="ctr"/>
+            <a:endParaRPr/>
           </a:p>
         </p:txBody>
       </p:sp>
@@ -13799,6 +14490,13 @@
   <p:clrMapOvr>
     <a:masterClrMapping/>
   </p:clrMapOvr>
+  <p:timing>
+    <p:tnLst>
+      <p:par>
+        <p:cTn id="1" dur="indefinite" restart="never" nodeType="tmRoot"/>
+      </p:par>
+    </p:tnLst>
+  </p:timing>
 </p:sld>
 </file>
 
